--- a/week13/wk13_Slides.pptx
+++ b/week13/wk13_Slides.pptx
@@ -9468,7 +9468,7 @@
         </p:nvSpPr>
         <p:spPr>
           <a:xfrm>
-            <a:off x="1524000" y="1122363"/>
+            <a:off x="1595966" y="201542"/>
             <a:ext cx="9144000" cy="1654393"/>
           </a:xfrm>
         </p:spPr>
@@ -9516,8 +9516,8 @@
         </p:blipFill>
         <p:spPr bwMode="auto">
           <a:xfrm>
-            <a:off x="3435443" y="2875920"/>
-            <a:ext cx="5398083" cy="2947801"/>
+            <a:off x="4106334" y="1941052"/>
+            <a:ext cx="4401225" cy="2403434"/>
           </a:xfrm>
           <a:prstGeom prst="rect">
             <a:avLst/>
@@ -9534,6 +9534,124 @@
           </a:extLst>
         </p:spPr>
       </p:pic>
+      <p:sp>
+        <p:nvSpPr>
+          <p:cNvPr id="6" name="TextBox 5">
+            <a:extLst>
+              <a:ext uri="{FF2B5EF4-FFF2-40B4-BE49-F238E27FC236}">
+                <a16:creationId xmlns:a16="http://schemas.microsoft.com/office/drawing/2014/main" id="{B8FA4EAA-9286-4DB8-2B45-7A57214AF7E5}"/>
+              </a:ext>
+            </a:extLst>
+          </p:cNvPr>
+          <p:cNvSpPr txBox="1"/>
+          <p:nvPr/>
+        </p:nvSpPr>
+        <p:spPr>
+          <a:xfrm>
+            <a:off x="3217333" y="5437651"/>
+            <a:ext cx="6096000" cy="369332"/>
+          </a:xfrm>
+          <a:prstGeom prst="rect">
+            <a:avLst/>
+          </a:prstGeom>
+          <a:noFill/>
+        </p:spPr>
+        <p:txBody>
+          <a:bodyPr wrap="square">
+            <a:spAutoFit/>
+          </a:bodyPr>
+          <a:lstStyle/>
+          <a:p>
+            <a:pPr algn="ctr"/>
+            <a:r>
+              <a:rPr lang="en-US" dirty="0">
+                <a:hlinkClick r:id="rId3"/>
+              </a:rPr>
+              <a:t>https://visualgo.net/en/sorting</a:t>
+            </a:r>
+            <a:r>
+              <a:rPr lang="en-US" dirty="0"/>
+              <a:t> </a:t>
+            </a:r>
+          </a:p>
+        </p:txBody>
+      </p:sp>
+      <p:sp>
+        <p:nvSpPr>
+          <p:cNvPr id="8" name="TextBox 7">
+            <a:extLst>
+              <a:ext uri="{FF2B5EF4-FFF2-40B4-BE49-F238E27FC236}">
+                <a16:creationId xmlns:a16="http://schemas.microsoft.com/office/drawing/2014/main" id="{0912DFED-C05C-71C5-C17A-D8B81D10A376}"/>
+              </a:ext>
+            </a:extLst>
+          </p:cNvPr>
+          <p:cNvSpPr txBox="1"/>
+          <p:nvPr/>
+        </p:nvSpPr>
+        <p:spPr>
+          <a:xfrm>
+            <a:off x="2313516" y="5892100"/>
+            <a:ext cx="8500533" cy="369332"/>
+          </a:xfrm>
+          <a:prstGeom prst="rect">
+            <a:avLst/>
+          </a:prstGeom>
+          <a:noFill/>
+        </p:spPr>
+        <p:txBody>
+          <a:bodyPr wrap="square">
+            <a:spAutoFit/>
+          </a:bodyPr>
+          <a:lstStyle/>
+          <a:p>
+            <a:r>
+              <a:rPr lang="en-US" dirty="0">
+                <a:hlinkClick r:id="rId4"/>
+              </a:rPr>
+              <a:t>https://www.hackerearth.com/practice/algorithms/sorting/merge-sort/visualize/</a:t>
+            </a:r>
+            <a:r>
+              <a:rPr lang="en-US" dirty="0"/>
+              <a:t> </a:t>
+            </a:r>
+          </a:p>
+        </p:txBody>
+      </p:sp>
+      <p:sp>
+        <p:nvSpPr>
+          <p:cNvPr id="10" name="TextBox 9">
+            <a:extLst>
+              <a:ext uri="{FF2B5EF4-FFF2-40B4-BE49-F238E27FC236}">
+                <a16:creationId xmlns:a16="http://schemas.microsoft.com/office/drawing/2014/main" id="{7780DD34-F23D-0E8C-6CB5-8FC25C82B649}"/>
+              </a:ext>
+            </a:extLst>
+          </p:cNvPr>
+          <p:cNvSpPr txBox="1"/>
+          <p:nvPr/>
+        </p:nvSpPr>
+        <p:spPr>
+          <a:xfrm>
+            <a:off x="5198532" y="4983202"/>
+            <a:ext cx="2730500" cy="369332"/>
+          </a:xfrm>
+          <a:prstGeom prst="rect">
+            <a:avLst/>
+          </a:prstGeom>
+          <a:noFill/>
+        </p:spPr>
+        <p:txBody>
+          <a:bodyPr wrap="square" rtlCol="0">
+            <a:spAutoFit/>
+          </a:bodyPr>
+          <a:lstStyle/>
+          <a:p>
+            <a:r>
+              <a:rPr lang="en-US" b="1" dirty="0"/>
+              <a:t>Visualization Tools:</a:t>
+            </a:r>
+          </a:p>
+        </p:txBody>
+      </p:sp>
     </p:spTree>
     <p:extLst>
       <p:ext uri="{BB962C8B-B14F-4D97-AF65-F5344CB8AC3E}">

--- a/week13/wk13_Slides.pptx
+++ b/week13/wk13_Slides.pptx
@@ -208,7 +208,7 @@
           <a:p>
             <a:fld id="{2A239D95-6F15-4DDC-A810-C9575B2200B4}" type="datetimeFigureOut">
               <a:rPr lang="en-US" smtClean="0"/>
-              <a:t>11/26/2025</a:t>
+              <a:t>11/27/2025</a:t>
             </a:fld>
             <a:endParaRPr lang="en-US"/>
           </a:p>
@@ -519,28 +519,6 @@
           <a:bodyPr/>
           <a:lstStyle/>
           <a:p>
-            <a:r>
-              <a:rPr lang="en-US" dirty="0"/>
-              <a:t>In 2006, Amazon reported that for every 100 milliseconds of delay in their website's loading time, they experienced a 1% decrease in sales. </a:t>
-            </a:r>
-          </a:p>
-          <a:p>
-            <a:r>
-              <a:rPr lang="en-US" dirty="0"/>
-              <a:t>If you know that Amazon’s net sale is </a:t>
-            </a:r>
-            <a:r>
-              <a:rPr lang="en-US" b="0" i="0" dirty="0">
-                <a:solidFill>
-                  <a:srgbClr val="0D0D0D"/>
-                </a:solidFill>
-                <a:effectLst/>
-                <a:latin typeface="Söhne"/>
-              </a:rPr>
-              <a:t>hundreds of billions of dollars. </a:t>
-            </a:r>
-          </a:p>
-          <a:p>
             <a:endParaRPr lang="en-US" dirty="0"/>
           </a:p>
         </p:txBody>
@@ -647,154 +625,6 @@
               <a:buFont typeface="Arial" panose="020B0604020202020204" pitchFamily="34" charset="0"/>
               <a:buNone/>
             </a:pPr>
-            <a:r>
-              <a:rPr lang="en-US" b="0" i="0" dirty="0">
-                <a:solidFill>
-                  <a:srgbClr val="212529"/>
-                </a:solidFill>
-                <a:effectLst/>
-                <a:latin typeface="-apple-system"/>
-              </a:rPr>
-              <a:t>Basic – Linear Search</a:t>
-            </a:r>
-          </a:p>
-          <a:p>
-            <a:pPr algn="l">
-              <a:buFont typeface="Arial" panose="020B0604020202020204" pitchFamily="34" charset="0"/>
-              <a:buChar char="•"/>
-            </a:pPr>
-            <a:r>
-              <a:rPr lang="en-US" b="0" i="0" dirty="0">
-                <a:solidFill>
-                  <a:srgbClr val="212529"/>
-                </a:solidFill>
-                <a:effectLst/>
-                <a:latin typeface="-apple-system"/>
-              </a:rPr>
-              <a:t>Basic idea: check each element in turn</a:t>
-            </a:r>
-          </a:p>
-          <a:p>
-            <a:pPr algn="l">
-              <a:buFont typeface="Arial" panose="020B0604020202020204" pitchFamily="34" charset="0"/>
-              <a:buChar char="•"/>
-            </a:pPr>
-            <a:r>
-              <a:rPr lang="en-US" b="0" i="0" dirty="0">
-                <a:solidFill>
-                  <a:srgbClr val="212529"/>
-                </a:solidFill>
-                <a:effectLst/>
-                <a:latin typeface="-apple-system"/>
-              </a:rPr>
-              <a:t>Use: find an element in an unsorted list</a:t>
-            </a:r>
-          </a:p>
-          <a:p>
-            <a:pPr algn="l">
-              <a:buFont typeface="Arial" panose="020B0604020202020204" pitchFamily="34" charset="0"/>
-              <a:buChar char="•"/>
-            </a:pPr>
-            <a:r>
-              <a:rPr lang="en-US" b="0" i="0" dirty="0">
-                <a:solidFill>
-                  <a:srgbClr val="212529"/>
-                </a:solidFill>
-                <a:effectLst/>
-                <a:latin typeface="-apple-system"/>
-              </a:rPr>
-              <a:t>Cost: O(N)</a:t>
-            </a:r>
-          </a:p>
-          <a:p>
-            <a:pPr algn="l">
-              <a:buFont typeface="Arial" panose="020B0604020202020204" pitchFamily="34" charset="0"/>
-              <a:buChar char="•"/>
-            </a:pPr>
-            <a:endParaRPr lang="en-US" b="0" i="0" dirty="0">
-              <a:solidFill>
-                <a:srgbClr val="212529"/>
-              </a:solidFill>
-              <a:effectLst/>
-              <a:latin typeface="-apple-system"/>
-            </a:endParaRPr>
-          </a:p>
-          <a:p>
-            <a:pPr algn="l">
-              <a:buFont typeface="Arial" panose="020B0604020202020204" pitchFamily="34" charset="0"/>
-              <a:buNone/>
-            </a:pPr>
-            <a:r>
-              <a:rPr lang="en-US" b="0" i="0" dirty="0">
-                <a:solidFill>
-                  <a:srgbClr val="212529"/>
-                </a:solidFill>
-                <a:effectLst/>
-                <a:latin typeface="-apple-system"/>
-              </a:rPr>
-              <a:t>Can we do it better? Can we leverage the fact that these cards are sorted?</a:t>
-            </a:r>
-          </a:p>
-          <a:p>
-            <a:pPr algn="l">
-              <a:buFont typeface="Arial" panose="020B0604020202020204" pitchFamily="34" charset="0"/>
-              <a:buNone/>
-            </a:pPr>
-            <a:endParaRPr lang="en-US" b="0" i="0" dirty="0">
-              <a:solidFill>
-                <a:srgbClr val="212529"/>
-              </a:solidFill>
-              <a:effectLst/>
-              <a:latin typeface="-apple-system"/>
-            </a:endParaRPr>
-          </a:p>
-          <a:p>
-            <a:pPr algn="l">
-              <a:buFont typeface="Arial" panose="020B0604020202020204" pitchFamily="34" charset="0"/>
-              <a:buNone/>
-            </a:pPr>
-            <a:endParaRPr lang="en-US" b="0" i="0" dirty="0">
-              <a:solidFill>
-                <a:srgbClr val="212529"/>
-              </a:solidFill>
-              <a:effectLst/>
-              <a:latin typeface="-apple-system"/>
-            </a:endParaRPr>
-          </a:p>
-          <a:p>
-            <a:pPr algn="l">
-              <a:buFont typeface="Arial" panose="020B0604020202020204" pitchFamily="34" charset="0"/>
-              <a:buNone/>
-            </a:pPr>
-            <a:endParaRPr lang="en-US" b="0" i="0" dirty="0">
-              <a:solidFill>
-                <a:srgbClr val="212529"/>
-              </a:solidFill>
-              <a:effectLst/>
-              <a:latin typeface="-apple-system"/>
-            </a:endParaRPr>
-          </a:p>
-          <a:p>
-            <a:pPr algn="l">
-              <a:buFont typeface="Arial" panose="020B0604020202020204" pitchFamily="34" charset="0"/>
-              <a:buNone/>
-            </a:pPr>
-            <a:endParaRPr lang="en-US" b="0" i="0" dirty="0">
-              <a:solidFill>
-                <a:srgbClr val="212529"/>
-              </a:solidFill>
-              <a:effectLst/>
-              <a:latin typeface="-apple-system"/>
-            </a:endParaRPr>
-          </a:p>
-          <a:p>
-            <a:endParaRPr lang="en-US" dirty="0"/>
-          </a:p>
-          <a:p>
-            <a:pPr algn="l">
-              <a:buFont typeface="Arial" panose="020B0604020202020204" pitchFamily="34" charset="0"/>
-              <a:buNone/>
-            </a:pPr>
             <a:endParaRPr lang="en-US" dirty="0"/>
           </a:p>
         </p:txBody>
@@ -903,254 +733,6 @@
           <a:bodyPr/>
           <a:lstStyle/>
           <a:p>
-            <a:r>
-              <a:rPr lang="en-US" dirty="0"/>
-              <a:t>Binary search is sometimes called “</a:t>
-            </a:r>
-            <a:r>
-              <a:rPr lang="en-US" i="1" dirty="0"/>
-              <a:t>divide and conquer in its purest form</a:t>
-            </a:r>
-            <a:r>
-              <a:rPr lang="en-US" dirty="0"/>
-              <a:t>.”</a:t>
-            </a:r>
-          </a:p>
-          <a:p>
-            <a:endParaRPr lang="en-US" dirty="0"/>
-          </a:p>
-          <a:p>
-            <a:pPr marL="171450" indent="-171450">
-              <a:buFontTx/>
-              <a:buChar char="-"/>
-            </a:pPr>
-            <a:r>
-              <a:rPr lang="en-US" dirty="0"/>
-              <a:t>In the worst case, I will continue cutting the data in half at every step until I'm left with one element..</a:t>
-            </a:r>
-          </a:p>
-          <a:p>
-            <a:pPr marL="171450" indent="-171450">
-              <a:buFontTx/>
-              <a:buChar char="-"/>
-            </a:pPr>
-            <a:r>
-              <a:rPr lang="en-US" dirty="0"/>
-              <a:t>.- SO the complexity or the number of steps basically depends on    </a:t>
-            </a:r>
-          </a:p>
-          <a:p>
-            <a:pPr marL="628650" lvl="1" indent="-171450">
-              <a:buFontTx/>
-              <a:buChar char="-"/>
-            </a:pPr>
-            <a:r>
-              <a:rPr lang="en-US" dirty="0"/>
-              <a:t>- How many times did I have to divide by 2 to get from n to 1    </a:t>
-            </a:r>
-          </a:p>
-          <a:p>
-            <a:pPr marL="628650" lvl="1" indent="-171450">
-              <a:buFontTx/>
-              <a:buChar char="-"/>
-            </a:pPr>
-            <a:r>
-              <a:rPr lang="en-US" dirty="0"/>
-              <a:t>- that efficiency is logarithmic. </a:t>
-            </a:r>
-          </a:p>
-          <a:p>
-            <a:pPr marL="171450" indent="-171450">
-              <a:buFontTx/>
-              <a:buChar char="-"/>
-            </a:pPr>
-            <a:r>
-              <a:rPr lang="en-US" dirty="0"/>
-              <a:t>- This is significantly better than an O(N) </a:t>
-            </a:r>
-            <a:r>
-              <a:rPr lang="en-US" dirty="0" err="1"/>
-              <a:t>algorithm.Binary</a:t>
-            </a:r>
-            <a:r>
-              <a:rPr lang="en-US" dirty="0"/>
-              <a:t> search is much faster than linear search when dealing with large, sorted collections</a:t>
-            </a:r>
-          </a:p>
-          <a:p>
-            <a:pPr marL="0" indent="0">
-              <a:buFontTx/>
-              <a:buNone/>
-            </a:pPr>
-            <a:endParaRPr lang="en-US" dirty="0"/>
-          </a:p>
-          <a:p>
-            <a:pPr marL="0" indent="0">
-              <a:buFontTx/>
-              <a:buNone/>
-            </a:pPr>
-            <a:r>
-              <a:rPr lang="en-US" dirty="0"/>
-              <a:t>.---------------</a:t>
-            </a:r>
-          </a:p>
-          <a:p>
-            <a:pPr algn="l">
-              <a:buFont typeface="Arial" panose="020B0604020202020204" pitchFamily="34" charset="0"/>
-              <a:buChar char="•"/>
-            </a:pPr>
-            <a:r>
-              <a:rPr lang="en-US" b="0" i="0" dirty="0">
-                <a:solidFill>
-                  <a:srgbClr val="212529"/>
-                </a:solidFill>
-                <a:effectLst/>
-                <a:latin typeface="-apple-system"/>
-              </a:rPr>
-              <a:t>Basic idea: in a </a:t>
-            </a:r>
-            <a:r>
-              <a:rPr lang="en-US" b="1" i="0" dirty="0">
-                <a:solidFill>
-                  <a:srgbClr val="212529"/>
-                </a:solidFill>
-                <a:effectLst/>
-                <a:latin typeface="-apple-system"/>
-              </a:rPr>
-              <a:t>sorted list</a:t>
-            </a:r>
-            <a:r>
-              <a:rPr lang="en-US" b="0" i="0" dirty="0">
-                <a:solidFill>
-                  <a:srgbClr val="212529"/>
-                </a:solidFill>
-                <a:effectLst/>
-                <a:latin typeface="-apple-system"/>
-              </a:rPr>
-              <a:t>, check middle element, eliminate half on each pass</a:t>
-            </a:r>
-          </a:p>
-          <a:p>
-            <a:pPr algn="l">
-              <a:buFont typeface="Arial" panose="020B0604020202020204" pitchFamily="34" charset="0"/>
-              <a:buChar char="•"/>
-            </a:pPr>
-            <a:r>
-              <a:rPr lang="en-US" b="0" i="0" dirty="0">
-                <a:solidFill>
-                  <a:srgbClr val="212529"/>
-                </a:solidFill>
-                <a:effectLst/>
-                <a:latin typeface="-apple-system"/>
-              </a:rPr>
-              <a:t>Uses:</a:t>
-            </a:r>
-          </a:p>
-          <a:p>
-            <a:pPr marL="742950" lvl="1" indent="-285750" algn="l">
-              <a:buFont typeface="Arial" panose="020B0604020202020204" pitchFamily="34" charset="0"/>
-              <a:buChar char="•"/>
-            </a:pPr>
-            <a:r>
-              <a:rPr lang="en-US" b="0" i="0" dirty="0">
-                <a:solidFill>
-                  <a:srgbClr val="212529"/>
-                </a:solidFill>
-                <a:effectLst/>
-                <a:latin typeface="-apple-system"/>
-              </a:rPr>
-              <a:t>Find an element in a sorted list</a:t>
-            </a:r>
-          </a:p>
-          <a:p>
-            <a:pPr marL="742950" lvl="1" indent="-285750" algn="l">
-              <a:buFont typeface="Arial" panose="020B0604020202020204" pitchFamily="34" charset="0"/>
-              <a:buChar char="•"/>
-            </a:pPr>
-            <a:r>
-              <a:rPr lang="en-US" b="0" i="0" dirty="0">
-                <a:solidFill>
-                  <a:srgbClr val="212529"/>
-                </a:solidFill>
-                <a:effectLst/>
-                <a:latin typeface="-apple-system"/>
-              </a:rPr>
-              <a:t>Number-guessing game (</a:t>
-            </a:r>
-            <a:r>
-              <a:rPr lang="en-US" b="0" i="0" dirty="0" err="1">
-                <a:solidFill>
-                  <a:srgbClr val="212529"/>
-                </a:solidFill>
-                <a:effectLst/>
-                <a:latin typeface="-apple-system"/>
-              </a:rPr>
-              <a:t>eg</a:t>
-            </a:r>
-            <a:r>
-              <a:rPr lang="en-US" b="0" i="0" dirty="0">
-                <a:solidFill>
-                  <a:srgbClr val="212529"/>
-                </a:solidFill>
-                <a:effectLst/>
-                <a:latin typeface="-apple-system"/>
-              </a:rPr>
-              <a:t>: guess a random number between 1 and 1000)</a:t>
-            </a:r>
-          </a:p>
-          <a:p>
-            <a:pPr marL="742950" lvl="1" indent="-285750" algn="l">
-              <a:buFont typeface="Arial" panose="020B0604020202020204" pitchFamily="34" charset="0"/>
-              <a:buChar char="•"/>
-            </a:pPr>
-            <a:r>
-              <a:rPr lang="en-US" b="0" i="0" dirty="0">
-                <a:solidFill>
-                  <a:srgbClr val="212529"/>
-                </a:solidFill>
-                <a:effectLst/>
-                <a:latin typeface="-apple-system"/>
-              </a:rPr>
-              <a:t>Find a root (zero) of a function with bisection (adapted binary search)</a:t>
-            </a:r>
-          </a:p>
-          <a:p>
-            <a:pPr algn="l">
-              <a:buFont typeface="Arial" panose="020B0604020202020204" pitchFamily="34" charset="0"/>
-              <a:buChar char="•"/>
-            </a:pPr>
-            <a:r>
-              <a:rPr lang="en-US" b="0" i="0" dirty="0">
-                <a:solidFill>
-                  <a:srgbClr val="212529"/>
-                </a:solidFill>
-                <a:effectLst/>
-                <a:latin typeface="-apple-system"/>
-              </a:rPr>
-              <a:t>Cost: O(</a:t>
-            </a:r>
-            <a:r>
-              <a:rPr lang="en-US" b="0" i="0" dirty="0" err="1">
-                <a:solidFill>
-                  <a:srgbClr val="212529"/>
-                </a:solidFill>
-                <a:effectLst/>
-                <a:latin typeface="-apple-system"/>
-              </a:rPr>
-              <a:t>logN</a:t>
-            </a:r>
-            <a:r>
-              <a:rPr lang="en-US" b="0" i="0" dirty="0">
-                <a:solidFill>
-                  <a:srgbClr val="212529"/>
-                </a:solidFill>
-                <a:effectLst/>
-                <a:latin typeface="-apple-system"/>
-              </a:rPr>
-              <a:t>)</a:t>
-            </a:r>
-          </a:p>
-          <a:p>
             <a:pPr algn="l">
               <a:buFont typeface="Arial" panose="020B0604020202020204" pitchFamily="34" charset="0"/>
               <a:buNone/>
@@ -1263,254 +845,6 @@
           <a:bodyPr/>
           <a:lstStyle/>
           <a:p>
-            <a:r>
-              <a:rPr lang="en-US" dirty="0"/>
-              <a:t>Binary search is sometimes called “</a:t>
-            </a:r>
-            <a:r>
-              <a:rPr lang="en-US" i="1" dirty="0"/>
-              <a:t>divide and conquer in its purest form</a:t>
-            </a:r>
-            <a:r>
-              <a:rPr lang="en-US" dirty="0"/>
-              <a:t>.”</a:t>
-            </a:r>
-          </a:p>
-          <a:p>
-            <a:endParaRPr lang="en-US" dirty="0"/>
-          </a:p>
-          <a:p>
-            <a:pPr marL="171450" indent="-171450">
-              <a:buFontTx/>
-              <a:buChar char="-"/>
-            </a:pPr>
-            <a:r>
-              <a:rPr lang="en-US" dirty="0"/>
-              <a:t>In the worst case, I will continue cutting the data in half at every step until I'm left with one element..</a:t>
-            </a:r>
-          </a:p>
-          <a:p>
-            <a:pPr marL="171450" indent="-171450">
-              <a:buFontTx/>
-              <a:buChar char="-"/>
-            </a:pPr>
-            <a:r>
-              <a:rPr lang="en-US" dirty="0"/>
-              <a:t>.- SO the complexity or the number of steps basically depends on    </a:t>
-            </a:r>
-          </a:p>
-          <a:p>
-            <a:pPr marL="628650" lvl="1" indent="-171450">
-              <a:buFontTx/>
-              <a:buChar char="-"/>
-            </a:pPr>
-            <a:r>
-              <a:rPr lang="en-US" dirty="0"/>
-              <a:t>- How many times did I have to divide by 2 to get from n to 1    </a:t>
-            </a:r>
-          </a:p>
-          <a:p>
-            <a:pPr marL="628650" lvl="1" indent="-171450">
-              <a:buFontTx/>
-              <a:buChar char="-"/>
-            </a:pPr>
-            <a:r>
-              <a:rPr lang="en-US" dirty="0"/>
-              <a:t>- that efficiency is logarithmic. </a:t>
-            </a:r>
-          </a:p>
-          <a:p>
-            <a:pPr marL="171450" indent="-171450">
-              <a:buFontTx/>
-              <a:buChar char="-"/>
-            </a:pPr>
-            <a:r>
-              <a:rPr lang="en-US" dirty="0"/>
-              <a:t>- This is significantly better than an O(N) </a:t>
-            </a:r>
-            <a:r>
-              <a:rPr lang="en-US" dirty="0" err="1"/>
-              <a:t>algorithm.Binary</a:t>
-            </a:r>
-            <a:r>
-              <a:rPr lang="en-US" dirty="0"/>
-              <a:t> search is much faster than linear search when dealing with large, sorted collections</a:t>
-            </a:r>
-          </a:p>
-          <a:p>
-            <a:pPr marL="0" indent="0">
-              <a:buFontTx/>
-              <a:buNone/>
-            </a:pPr>
-            <a:endParaRPr lang="en-US" dirty="0"/>
-          </a:p>
-          <a:p>
-            <a:pPr marL="0" indent="0">
-              <a:buFontTx/>
-              <a:buNone/>
-            </a:pPr>
-            <a:r>
-              <a:rPr lang="en-US" dirty="0"/>
-              <a:t>.---------------</a:t>
-            </a:r>
-          </a:p>
-          <a:p>
-            <a:pPr algn="l">
-              <a:buFont typeface="Arial" panose="020B0604020202020204" pitchFamily="34" charset="0"/>
-              <a:buChar char="•"/>
-            </a:pPr>
-            <a:r>
-              <a:rPr lang="en-US" b="0" i="0" dirty="0">
-                <a:solidFill>
-                  <a:srgbClr val="212529"/>
-                </a:solidFill>
-                <a:effectLst/>
-                <a:latin typeface="-apple-system"/>
-              </a:rPr>
-              <a:t>Basic idea: in a </a:t>
-            </a:r>
-            <a:r>
-              <a:rPr lang="en-US" b="1" i="0" dirty="0">
-                <a:solidFill>
-                  <a:srgbClr val="212529"/>
-                </a:solidFill>
-                <a:effectLst/>
-                <a:latin typeface="-apple-system"/>
-              </a:rPr>
-              <a:t>sorted list</a:t>
-            </a:r>
-            <a:r>
-              <a:rPr lang="en-US" b="0" i="0" dirty="0">
-                <a:solidFill>
-                  <a:srgbClr val="212529"/>
-                </a:solidFill>
-                <a:effectLst/>
-                <a:latin typeface="-apple-system"/>
-              </a:rPr>
-              <a:t>, check middle element, eliminate half on each pass</a:t>
-            </a:r>
-          </a:p>
-          <a:p>
-            <a:pPr algn="l">
-              <a:buFont typeface="Arial" panose="020B0604020202020204" pitchFamily="34" charset="0"/>
-              <a:buChar char="•"/>
-            </a:pPr>
-            <a:r>
-              <a:rPr lang="en-US" b="0" i="0" dirty="0">
-                <a:solidFill>
-                  <a:srgbClr val="212529"/>
-                </a:solidFill>
-                <a:effectLst/>
-                <a:latin typeface="-apple-system"/>
-              </a:rPr>
-              <a:t>Uses:</a:t>
-            </a:r>
-          </a:p>
-          <a:p>
-            <a:pPr marL="742950" lvl="1" indent="-285750" algn="l">
-              <a:buFont typeface="Arial" panose="020B0604020202020204" pitchFamily="34" charset="0"/>
-              <a:buChar char="•"/>
-            </a:pPr>
-            <a:r>
-              <a:rPr lang="en-US" b="0" i="0" dirty="0">
-                <a:solidFill>
-                  <a:srgbClr val="212529"/>
-                </a:solidFill>
-                <a:effectLst/>
-                <a:latin typeface="-apple-system"/>
-              </a:rPr>
-              <a:t>Find an element in a sorted list</a:t>
-            </a:r>
-          </a:p>
-          <a:p>
-            <a:pPr marL="742950" lvl="1" indent="-285750" algn="l">
-              <a:buFont typeface="Arial" panose="020B0604020202020204" pitchFamily="34" charset="0"/>
-              <a:buChar char="•"/>
-            </a:pPr>
-            <a:r>
-              <a:rPr lang="en-US" b="0" i="0" dirty="0">
-                <a:solidFill>
-                  <a:srgbClr val="212529"/>
-                </a:solidFill>
-                <a:effectLst/>
-                <a:latin typeface="-apple-system"/>
-              </a:rPr>
-              <a:t>Number-guessing game (</a:t>
-            </a:r>
-            <a:r>
-              <a:rPr lang="en-US" b="0" i="0" dirty="0" err="1">
-                <a:solidFill>
-                  <a:srgbClr val="212529"/>
-                </a:solidFill>
-                <a:effectLst/>
-                <a:latin typeface="-apple-system"/>
-              </a:rPr>
-              <a:t>eg</a:t>
-            </a:r>
-            <a:r>
-              <a:rPr lang="en-US" b="0" i="0" dirty="0">
-                <a:solidFill>
-                  <a:srgbClr val="212529"/>
-                </a:solidFill>
-                <a:effectLst/>
-                <a:latin typeface="-apple-system"/>
-              </a:rPr>
-              <a:t>: guess a random number between 1 and 1000)</a:t>
-            </a:r>
-          </a:p>
-          <a:p>
-            <a:pPr marL="742950" lvl="1" indent="-285750" algn="l">
-              <a:buFont typeface="Arial" panose="020B0604020202020204" pitchFamily="34" charset="0"/>
-              <a:buChar char="•"/>
-            </a:pPr>
-            <a:r>
-              <a:rPr lang="en-US" b="0" i="0" dirty="0">
-                <a:solidFill>
-                  <a:srgbClr val="212529"/>
-                </a:solidFill>
-                <a:effectLst/>
-                <a:latin typeface="-apple-system"/>
-              </a:rPr>
-              <a:t>Find a root (zero) of a function with bisection (adapted binary search)</a:t>
-            </a:r>
-          </a:p>
-          <a:p>
-            <a:pPr algn="l">
-              <a:buFont typeface="Arial" panose="020B0604020202020204" pitchFamily="34" charset="0"/>
-              <a:buChar char="•"/>
-            </a:pPr>
-            <a:r>
-              <a:rPr lang="en-US" b="0" i="0" dirty="0">
-                <a:solidFill>
-                  <a:srgbClr val="212529"/>
-                </a:solidFill>
-                <a:effectLst/>
-                <a:latin typeface="-apple-system"/>
-              </a:rPr>
-              <a:t>Cost: O(</a:t>
-            </a:r>
-            <a:r>
-              <a:rPr lang="en-US" b="0" i="0" dirty="0" err="1">
-                <a:solidFill>
-                  <a:srgbClr val="212529"/>
-                </a:solidFill>
-                <a:effectLst/>
-                <a:latin typeface="-apple-system"/>
-              </a:rPr>
-              <a:t>logN</a:t>
-            </a:r>
-            <a:r>
-              <a:rPr lang="en-US" b="0" i="0" dirty="0">
-                <a:solidFill>
-                  <a:srgbClr val="212529"/>
-                </a:solidFill>
-                <a:effectLst/>
-                <a:latin typeface="-apple-system"/>
-              </a:rPr>
-              <a:t>)</a:t>
-            </a:r>
-          </a:p>
-          <a:p>
             <a:pPr algn="l">
               <a:buFont typeface="Arial" panose="020B0604020202020204" pitchFamily="34" charset="0"/>
               <a:buNone/>
@@ -2033,11 +1367,7 @@
               <a:buSzPts val="1400"/>
               <a:buNone/>
             </a:pPr>
-            <a:r>
-              <a:rPr lang="en-US"/>
-              <a:t>How will this change if pivot is the middle</a:t>
-            </a:r>
-            <a:endParaRPr/>
+            <a:endParaRPr dirty="0"/>
           </a:p>
         </p:txBody>
       </p:sp>
@@ -2154,207 +1484,6 @@
         <p:txBody>
           <a:bodyPr/>
           <a:lstStyle/>
-          <a:p>
-            <a:r>
-              <a:rPr lang="en-US" dirty="0"/>
-              <a:t>Perfect! I've created a detailed step-by-step visualization for your specific example </a:t>
-            </a:r>
-            <a:r>
-              <a:rPr lang="en-US" b="1" dirty="0"/>
-              <a:t>[4, 3, 1, 2]</a:t>
-            </a:r>
-            <a:r>
-              <a:rPr lang="en-US" dirty="0"/>
-              <a:t> with pivot = 2 (last element).</a:t>
-            </a:r>
-          </a:p>
-          <a:p>
-            <a:r>
-              <a:rPr lang="en-US" b="1" dirty="0"/>
-              <a:t>Here's what happens:</a:t>
-            </a:r>
-            <a:endParaRPr lang="en-US" dirty="0"/>
-          </a:p>
-          <a:p>
-            <a:r>
-              <a:rPr lang="en-US" b="1" dirty="0"/>
-              <a:t>Initial:</a:t>
-            </a:r>
-            <a:r>
-              <a:rPr lang="en-US" dirty="0"/>
-              <a:t> Pivot = 2, </a:t>
-            </a:r>
-            <a:r>
-              <a:rPr lang="en-US" dirty="0" err="1"/>
-              <a:t>boundaryIndex</a:t>
-            </a:r>
-            <a:r>
-              <a:rPr lang="en-US" dirty="0"/>
-              <a:t> = 0, loop from </a:t>
-            </a:r>
-            <a:r>
-              <a:rPr lang="en-US" dirty="0" err="1"/>
-              <a:t>i</a:t>
-            </a:r>
-            <a:r>
-              <a:rPr lang="en-US" dirty="0"/>
-              <a:t> = 0 to 2</a:t>
-            </a:r>
-          </a:p>
-          <a:p>
-            <a:r>
-              <a:rPr lang="en-US" b="1" dirty="0"/>
-              <a:t>Step 1:</a:t>
-            </a:r>
-            <a:r>
-              <a:rPr lang="en-US" dirty="0"/>
-              <a:t> Check </a:t>
-            </a:r>
-            <a:r>
-              <a:rPr lang="en-US" dirty="0" err="1"/>
-              <a:t>arr</a:t>
-            </a:r>
-            <a:r>
-              <a:rPr lang="en-US" dirty="0"/>
-              <a:t>[0] = 4. Since 4 ≥ 2, no swap, boundary stays at 0</a:t>
-            </a:r>
-          </a:p>
-          <a:p>
-            <a:r>
-              <a:rPr lang="en-US" b="1" dirty="0"/>
-              <a:t>Step 2:</a:t>
-            </a:r>
-            <a:r>
-              <a:rPr lang="en-US" dirty="0"/>
-              <a:t> Check </a:t>
-            </a:r>
-            <a:r>
-              <a:rPr lang="en-US" dirty="0" err="1"/>
-              <a:t>arr</a:t>
-            </a:r>
-            <a:r>
-              <a:rPr lang="en-US" dirty="0"/>
-              <a:t>[1] = 3. Since 3 ≥ 2, no swap, boundary stays at 0</a:t>
-            </a:r>
-          </a:p>
-          <a:p>
-            <a:r>
-              <a:rPr lang="en-US" b="1" dirty="0"/>
-              <a:t>Step 3:</a:t>
-            </a:r>
-            <a:r>
-              <a:rPr lang="en-US" dirty="0"/>
-              <a:t> Check </a:t>
-            </a:r>
-            <a:r>
-              <a:rPr lang="en-US" dirty="0" err="1"/>
-              <a:t>arr</a:t>
-            </a:r>
-            <a:r>
-              <a:rPr lang="en-US" dirty="0"/>
-              <a:t>[2] = 1. Since 1 &lt; 2, </a:t>
-            </a:r>
-            <a:r>
-              <a:rPr lang="en-US" b="1" dirty="0"/>
-              <a:t>swap </a:t>
-            </a:r>
-            <a:r>
-              <a:rPr lang="en-US" b="1" dirty="0" err="1"/>
-              <a:t>arr</a:t>
-            </a:r>
-            <a:r>
-              <a:rPr lang="en-US" b="1" dirty="0"/>
-              <a:t>[2] with </a:t>
-            </a:r>
-            <a:r>
-              <a:rPr lang="en-US" b="1" dirty="0" err="1"/>
-              <a:t>arr</a:t>
-            </a:r>
-            <a:r>
-              <a:rPr lang="en-US" b="1" dirty="0"/>
-              <a:t>[0]</a:t>
-            </a:r>
-            <a:r>
-              <a:rPr lang="en-US" dirty="0"/>
-              <a:t>, and boundary becomes 1</a:t>
-            </a:r>
-          </a:p>
-          <a:p>
-            <a:r>
-              <a:rPr lang="en-US" dirty="0"/>
-              <a:t>Array becomes: [1, 3, 4, 2]</a:t>
-            </a:r>
-          </a:p>
-          <a:p>
-            <a:r>
-              <a:rPr lang="en-US" b="1" dirty="0"/>
-              <a:t>Step 4:</a:t>
-            </a:r>
-            <a:r>
-              <a:rPr lang="en-US" dirty="0"/>
-              <a:t> Loop complete. Now swap pivot (at index 3) with </a:t>
-            </a:r>
-            <a:r>
-              <a:rPr lang="en-US" dirty="0" err="1"/>
-              <a:t>arr</a:t>
-            </a:r>
-            <a:r>
-              <a:rPr lang="en-US" dirty="0"/>
-              <a:t>[boundaryIndex-1] = </a:t>
-            </a:r>
-            <a:r>
-              <a:rPr lang="en-US" dirty="0" err="1"/>
-              <a:t>arr</a:t>
-            </a:r>
-            <a:r>
-              <a:rPr lang="en-US" dirty="0"/>
-              <a:t>[0]</a:t>
-            </a:r>
-          </a:p>
-          <a:p>
-            <a:r>
-              <a:rPr lang="en-US" dirty="0"/>
-              <a:t>Final swap: </a:t>
-            </a:r>
-            <a:r>
-              <a:rPr lang="en-US" dirty="0" err="1"/>
-              <a:t>arr</a:t>
-            </a:r>
-            <a:r>
-              <a:rPr lang="en-US" dirty="0"/>
-              <a:t>[3] ↔ </a:t>
-            </a:r>
-            <a:r>
-              <a:rPr lang="en-US" dirty="0" err="1"/>
-              <a:t>arr</a:t>
-            </a:r>
-            <a:r>
-              <a:rPr lang="en-US" dirty="0"/>
-              <a:t>[0]</a:t>
-            </a:r>
-          </a:p>
-          <a:p>
-            <a:r>
-              <a:rPr lang="en-US" dirty="0"/>
-              <a:t>Array becomes: [2, 3, 4, 1]</a:t>
-            </a:r>
-          </a:p>
-          <a:p>
-            <a:r>
-              <a:rPr lang="en-US" b="1" dirty="0"/>
-              <a:t>Result:</a:t>
-            </a:r>
-            <a:r>
-              <a:rPr lang="en-US" dirty="0"/>
-              <a:t> The pivot (2) is now at index 0 in its correct position! All elements to the right (3, 4, 1) are ≥ 2. The function returns 0 as the pivot's final index.</a:t>
-            </a:r>
-          </a:p>
-          <a:p>
-            <a:r>
-              <a:rPr lang="en-US" dirty="0"/>
-              <a:t>Note: In this case, the pivot ended up at the very beginning because only one element (1) was smaller than the pivot (2).</a:t>
-            </a:r>
-          </a:p>
           <a:p>
             <a:endParaRPr lang="en-US" dirty="0"/>
           </a:p>
@@ -2510,303 +1639,6 @@
             <a:noAutofit/>
           </a:bodyPr>
           <a:lstStyle/>
-          <a:p>
-            <a:pPr marL="457200" marR="25400" lvl="0" indent="-304800" algn="l" rtl="0">
-              <a:lnSpc>
-                <a:spcPct val="156250"/>
-              </a:lnSpc>
-              <a:spcBef>
-                <a:spcPts val="1500"/>
-              </a:spcBef>
-              <a:spcAft>
-                <a:spcPts val="0"/>
-              </a:spcAft>
-              <a:buClr>
-                <a:schemeClr val="dk1"/>
-              </a:buClr>
-              <a:buSzPts val="1200"/>
-              <a:buFont typeface="Arial"/>
-              <a:buChar char="○"/>
-            </a:pPr>
-            <a:endParaRPr b="1" dirty="0">
-              <a:highlight>
-                <a:schemeClr val="lt1"/>
-              </a:highlight>
-              <a:latin typeface="Arial"/>
-              <a:ea typeface="Arial"/>
-              <a:cs typeface="Arial"/>
-              <a:sym typeface="Arial"/>
-            </a:endParaRPr>
-          </a:p>
-          <a:p>
-            <a:pPr marL="457200" marR="25400" lvl="0" indent="-304800" algn="l" rtl="0">
-              <a:lnSpc>
-                <a:spcPct val="156250"/>
-              </a:lnSpc>
-              <a:spcBef>
-                <a:spcPts val="0"/>
-              </a:spcBef>
-              <a:spcAft>
-                <a:spcPts val="0"/>
-              </a:spcAft>
-              <a:buClr>
-                <a:schemeClr val="dk1"/>
-              </a:buClr>
-              <a:buSzPts val="1200"/>
-              <a:buFont typeface="Roboto"/>
-              <a:buChar char="○"/>
-            </a:pPr>
-            <a:r>
-              <a:rPr lang="en-US" b="1" dirty="0">
-                <a:highlight>
-                  <a:schemeClr val="lt1"/>
-                </a:highlight>
-                <a:latin typeface="Arial"/>
-                <a:ea typeface="Arial"/>
-                <a:cs typeface="Arial"/>
-                <a:sym typeface="Arial"/>
-              </a:rPr>
-              <a:t>Best Case Complexity -</a:t>
-            </a:r>
-            <a:r>
-              <a:rPr lang="en-US" dirty="0">
-                <a:highlight>
-                  <a:schemeClr val="lt1"/>
-                </a:highlight>
-                <a:latin typeface="Arial"/>
-                <a:ea typeface="Arial"/>
-                <a:cs typeface="Arial"/>
-                <a:sym typeface="Arial"/>
-              </a:rPr>
-              <a:t> In Quicksort, the best-case occurs when the pivot element is the middle element or near to the middle element. The best-case time complexity of quicksort is </a:t>
-            </a:r>
-            <a:r>
-              <a:rPr lang="en-US" b="1" dirty="0">
-                <a:highlight>
-                  <a:schemeClr val="lt1"/>
-                </a:highlight>
-                <a:latin typeface="Arial"/>
-                <a:ea typeface="Arial"/>
-                <a:cs typeface="Arial"/>
-                <a:sym typeface="Arial"/>
-              </a:rPr>
-              <a:t>O(n*</a:t>
-            </a:r>
-            <a:r>
-              <a:rPr lang="en-US" b="1" dirty="0" err="1">
-                <a:highlight>
-                  <a:schemeClr val="lt1"/>
-                </a:highlight>
-                <a:latin typeface="Arial"/>
-                <a:ea typeface="Arial"/>
-                <a:cs typeface="Arial"/>
-                <a:sym typeface="Arial"/>
-              </a:rPr>
-              <a:t>logn</a:t>
-            </a:r>
-            <a:r>
-              <a:rPr lang="en-US" b="1" dirty="0">
-                <a:highlight>
-                  <a:schemeClr val="lt1"/>
-                </a:highlight>
-                <a:latin typeface="Arial"/>
-                <a:ea typeface="Arial"/>
-                <a:cs typeface="Arial"/>
-                <a:sym typeface="Arial"/>
-              </a:rPr>
-              <a:t>)</a:t>
-            </a:r>
-            <a:r>
-              <a:rPr lang="en-US" dirty="0">
-                <a:highlight>
-                  <a:schemeClr val="lt1"/>
-                </a:highlight>
-                <a:latin typeface="Arial"/>
-                <a:ea typeface="Arial"/>
-                <a:cs typeface="Arial"/>
-                <a:sym typeface="Arial"/>
-              </a:rPr>
-              <a:t>.</a:t>
-            </a:r>
-            <a:endParaRPr dirty="0">
-              <a:highlight>
-                <a:schemeClr val="lt1"/>
-              </a:highlight>
-              <a:latin typeface="Arial"/>
-              <a:ea typeface="Arial"/>
-              <a:cs typeface="Arial"/>
-              <a:sym typeface="Arial"/>
-            </a:endParaRPr>
-          </a:p>
-          <a:p>
-            <a:pPr marL="457200" marR="25400" lvl="0" indent="-304800" algn="l" rtl="0">
-              <a:lnSpc>
-                <a:spcPct val="156250"/>
-              </a:lnSpc>
-              <a:spcBef>
-                <a:spcPts val="0"/>
-              </a:spcBef>
-              <a:spcAft>
-                <a:spcPts val="0"/>
-              </a:spcAft>
-              <a:buClr>
-                <a:schemeClr val="dk1"/>
-              </a:buClr>
-              <a:buSzPts val="1200"/>
-              <a:buFont typeface="Roboto"/>
-              <a:buChar char="○"/>
-            </a:pPr>
-            <a:r>
-              <a:rPr lang="en-US" b="1" dirty="0">
-                <a:highlight>
-                  <a:schemeClr val="lt1"/>
-                </a:highlight>
-                <a:latin typeface="Arial"/>
-                <a:ea typeface="Arial"/>
-                <a:cs typeface="Arial"/>
-                <a:sym typeface="Arial"/>
-              </a:rPr>
-              <a:t>Worst Case Complexity -</a:t>
-            </a:r>
-            <a:r>
-              <a:rPr lang="en-US" dirty="0">
-                <a:highlight>
-                  <a:schemeClr val="lt1"/>
-                </a:highlight>
-                <a:latin typeface="Arial"/>
-                <a:ea typeface="Arial"/>
-                <a:cs typeface="Arial"/>
-                <a:sym typeface="Arial"/>
-              </a:rPr>
-              <a:t> In quick sort, worst case occurs when the pivot element is either greatest or smallest element. Suppose, if the pivot element is always the last element of the array, the worst case would occur when the given array is sorted already in ascending or descending order. The worst-case time complexity of quicksort is </a:t>
-            </a:r>
-            <a:r>
-              <a:rPr lang="en-US" b="1" dirty="0">
-                <a:highlight>
-                  <a:schemeClr val="lt1"/>
-                </a:highlight>
-                <a:latin typeface="Arial"/>
-                <a:ea typeface="Arial"/>
-                <a:cs typeface="Arial"/>
-                <a:sym typeface="Arial"/>
-              </a:rPr>
-              <a:t>O(n</a:t>
-            </a:r>
-            <a:r>
-              <a:rPr lang="en-US" b="1" baseline="30000" dirty="0">
-                <a:highlight>
-                  <a:schemeClr val="lt1"/>
-                </a:highlight>
-                <a:latin typeface="Arial"/>
-                <a:ea typeface="Arial"/>
-                <a:cs typeface="Arial"/>
-                <a:sym typeface="Arial"/>
-              </a:rPr>
-              <a:t>2</a:t>
-            </a:r>
-            <a:r>
-              <a:rPr lang="en-US" b="1" dirty="0">
-                <a:highlight>
-                  <a:schemeClr val="lt1"/>
-                </a:highlight>
-                <a:latin typeface="Arial"/>
-                <a:ea typeface="Arial"/>
-                <a:cs typeface="Arial"/>
-                <a:sym typeface="Arial"/>
-              </a:rPr>
-              <a:t>)</a:t>
-            </a:r>
-            <a:r>
-              <a:rPr lang="en-US" dirty="0">
-                <a:highlight>
-                  <a:schemeClr val="lt1"/>
-                </a:highlight>
-                <a:latin typeface="Arial"/>
-                <a:ea typeface="Arial"/>
-                <a:cs typeface="Arial"/>
-                <a:sym typeface="Arial"/>
-              </a:rPr>
-              <a:t>.</a:t>
-            </a:r>
-            <a:endParaRPr dirty="0">
-              <a:highlight>
-                <a:schemeClr val="lt1"/>
-              </a:highlight>
-              <a:latin typeface="Arial"/>
-              <a:ea typeface="Arial"/>
-              <a:cs typeface="Arial"/>
-              <a:sym typeface="Arial"/>
-            </a:endParaRPr>
-          </a:p>
-          <a:p>
-            <a:pPr marL="457200" lvl="0" indent="-304800" algn="l" rtl="0">
-              <a:lnSpc>
-                <a:spcPct val="218181"/>
-              </a:lnSpc>
-              <a:spcBef>
-                <a:spcPts val="0"/>
-              </a:spcBef>
-              <a:spcAft>
-                <a:spcPts val="0"/>
-              </a:spcAft>
-              <a:buClr>
-                <a:srgbClr val="242424"/>
-              </a:buClr>
-              <a:buSzPts val="1200"/>
-              <a:buFont typeface="Arial"/>
-              <a:buChar char="○"/>
-            </a:pPr>
-            <a:r>
-              <a:rPr lang="en-US" dirty="0">
-                <a:solidFill>
-                  <a:srgbClr val="242424"/>
-                </a:solidFill>
-                <a:highlight>
-                  <a:srgbClr val="FFFFFF"/>
-                </a:highlight>
-                <a:latin typeface="Arial"/>
-                <a:ea typeface="Arial"/>
-                <a:cs typeface="Arial"/>
-                <a:sym typeface="Arial"/>
-              </a:rPr>
-              <a:t>When the pivot element is the largest or smallest, or when all of the components have the same size. The performance of the quicksort is significantly impacted by these worst-case scenarios.</a:t>
-            </a:r>
-            <a:endParaRPr dirty="0">
-              <a:solidFill>
-                <a:srgbClr val="242424"/>
-              </a:solidFill>
-              <a:highlight>
-                <a:srgbClr val="FFFFFF"/>
-              </a:highlight>
-              <a:latin typeface="Arial"/>
-              <a:ea typeface="Arial"/>
-              <a:cs typeface="Arial"/>
-              <a:sym typeface="Arial"/>
-            </a:endParaRPr>
-          </a:p>
-          <a:p>
-            <a:pPr marL="0" marR="25400" lvl="0" indent="0" algn="l" rtl="0">
-              <a:lnSpc>
-                <a:spcPct val="156250"/>
-              </a:lnSpc>
-              <a:spcBef>
-                <a:spcPts val="1500"/>
-              </a:spcBef>
-              <a:spcAft>
-                <a:spcPts val="0"/>
-              </a:spcAft>
-              <a:buNone/>
-            </a:pPr>
-            <a:endParaRPr dirty="0">
-              <a:highlight>
-                <a:schemeClr val="lt1"/>
-              </a:highlight>
-              <a:latin typeface="Arial"/>
-              <a:ea typeface="Arial"/>
-              <a:cs typeface="Arial"/>
-              <a:sym typeface="Arial"/>
-            </a:endParaRPr>
-          </a:p>
           <a:p>
             <a:pPr marL="0" marR="25400" lvl="0" indent="0" algn="l" rtl="0">
               <a:lnSpc>
@@ -3048,7 +1880,7 @@
           <a:p>
             <a:fld id="{7210A1B6-8E74-4EDC-9EB9-3D3FE115FB03}" type="datetimeFigureOut">
               <a:rPr lang="en-US" smtClean="0"/>
-              <a:t>11/26/2025</a:t>
+              <a:t>11/27/2025</a:t>
             </a:fld>
             <a:endParaRPr lang="en-US"/>
           </a:p>
@@ -3246,7 +2078,7 @@
           <a:p>
             <a:fld id="{7210A1B6-8E74-4EDC-9EB9-3D3FE115FB03}" type="datetimeFigureOut">
               <a:rPr lang="en-US" smtClean="0"/>
-              <a:t>11/26/2025</a:t>
+              <a:t>11/27/2025</a:t>
             </a:fld>
             <a:endParaRPr lang="en-US"/>
           </a:p>
@@ -3454,7 +2286,7 @@
           <a:p>
             <a:fld id="{7210A1B6-8E74-4EDC-9EB9-3D3FE115FB03}" type="datetimeFigureOut">
               <a:rPr lang="en-US" smtClean="0"/>
-              <a:t>11/26/2025</a:t>
+              <a:t>11/27/2025</a:t>
             </a:fld>
             <a:endParaRPr lang="en-US"/>
           </a:p>
@@ -3652,7 +2484,7 @@
           <a:p>
             <a:fld id="{7210A1B6-8E74-4EDC-9EB9-3D3FE115FB03}" type="datetimeFigureOut">
               <a:rPr lang="en-US" smtClean="0"/>
-              <a:t>11/26/2025</a:t>
+              <a:t>11/27/2025</a:t>
             </a:fld>
             <a:endParaRPr lang="en-US"/>
           </a:p>
@@ -3927,7 +2759,7 @@
           <a:p>
             <a:fld id="{7210A1B6-8E74-4EDC-9EB9-3D3FE115FB03}" type="datetimeFigureOut">
               <a:rPr lang="en-US" smtClean="0"/>
-              <a:t>11/26/2025</a:t>
+              <a:t>11/27/2025</a:t>
             </a:fld>
             <a:endParaRPr lang="en-US"/>
           </a:p>
@@ -4192,7 +3024,7 @@
           <a:p>
             <a:fld id="{7210A1B6-8E74-4EDC-9EB9-3D3FE115FB03}" type="datetimeFigureOut">
               <a:rPr lang="en-US" smtClean="0"/>
-              <a:t>11/26/2025</a:t>
+              <a:t>11/27/2025</a:t>
             </a:fld>
             <a:endParaRPr lang="en-US"/>
           </a:p>
@@ -4604,7 +3436,7 @@
           <a:p>
             <a:fld id="{7210A1B6-8E74-4EDC-9EB9-3D3FE115FB03}" type="datetimeFigureOut">
               <a:rPr lang="en-US" smtClean="0"/>
-              <a:t>11/26/2025</a:t>
+              <a:t>11/27/2025</a:t>
             </a:fld>
             <a:endParaRPr lang="en-US"/>
           </a:p>
@@ -4745,7 +3577,7 @@
           <a:p>
             <a:fld id="{7210A1B6-8E74-4EDC-9EB9-3D3FE115FB03}" type="datetimeFigureOut">
               <a:rPr lang="en-US" smtClean="0"/>
-              <a:t>11/26/2025</a:t>
+              <a:t>11/27/2025</a:t>
             </a:fld>
             <a:endParaRPr lang="en-US"/>
           </a:p>
@@ -4858,7 +3690,7 @@
           <a:p>
             <a:fld id="{7210A1B6-8E74-4EDC-9EB9-3D3FE115FB03}" type="datetimeFigureOut">
               <a:rPr lang="en-US" smtClean="0"/>
-              <a:t>11/26/2025</a:t>
+              <a:t>11/27/2025</a:t>
             </a:fld>
             <a:endParaRPr lang="en-US"/>
           </a:p>
@@ -5169,7 +4001,7 @@
           <a:p>
             <a:fld id="{7210A1B6-8E74-4EDC-9EB9-3D3FE115FB03}" type="datetimeFigureOut">
               <a:rPr lang="en-US" smtClean="0"/>
-              <a:t>11/26/2025</a:t>
+              <a:t>11/27/2025</a:t>
             </a:fld>
             <a:endParaRPr lang="en-US"/>
           </a:p>
@@ -5457,7 +4289,7 @@
           <a:p>
             <a:fld id="{7210A1B6-8E74-4EDC-9EB9-3D3FE115FB03}" type="datetimeFigureOut">
               <a:rPr lang="en-US" smtClean="0"/>
-              <a:t>11/26/2025</a:t>
+              <a:t>11/27/2025</a:t>
             </a:fld>
             <a:endParaRPr lang="en-US"/>
           </a:p>
@@ -5698,7 +4530,7 @@
           <a:p>
             <a:fld id="{7210A1B6-8E74-4EDC-9EB9-3D3FE115FB03}" type="datetimeFigureOut">
               <a:rPr lang="en-US" smtClean="0"/>
-              <a:t>11/26/2025</a:t>
+              <a:t>11/27/2025</a:t>
             </a:fld>
             <a:endParaRPr lang="en-US"/>
           </a:p>
@@ -9468,7 +8300,7 @@
         </p:nvSpPr>
         <p:spPr>
           <a:xfrm>
-            <a:off x="1595966" y="201542"/>
+            <a:off x="1524000" y="1122363"/>
             <a:ext cx="9144000" cy="1654393"/>
           </a:xfrm>
         </p:spPr>
@@ -9516,8 +8348,8 @@
         </p:blipFill>
         <p:spPr bwMode="auto">
           <a:xfrm>
-            <a:off x="4106334" y="1941052"/>
-            <a:ext cx="4401225" cy="2403434"/>
+            <a:off x="3435443" y="2875920"/>
+            <a:ext cx="5398083" cy="2947801"/>
           </a:xfrm>
           <a:prstGeom prst="rect">
             <a:avLst/>
@@ -9534,124 +8366,6 @@
           </a:extLst>
         </p:spPr>
       </p:pic>
-      <p:sp>
-        <p:nvSpPr>
-          <p:cNvPr id="6" name="TextBox 5">
-            <a:extLst>
-              <a:ext uri="{FF2B5EF4-FFF2-40B4-BE49-F238E27FC236}">
-                <a16:creationId xmlns:a16="http://schemas.microsoft.com/office/drawing/2014/main" id="{B8FA4EAA-9286-4DB8-2B45-7A57214AF7E5}"/>
-              </a:ext>
-            </a:extLst>
-          </p:cNvPr>
-          <p:cNvSpPr txBox="1"/>
-          <p:nvPr/>
-        </p:nvSpPr>
-        <p:spPr>
-          <a:xfrm>
-            <a:off x="3217333" y="5437651"/>
-            <a:ext cx="6096000" cy="369332"/>
-          </a:xfrm>
-          <a:prstGeom prst="rect">
-            <a:avLst/>
-          </a:prstGeom>
-          <a:noFill/>
-        </p:spPr>
-        <p:txBody>
-          <a:bodyPr wrap="square">
-            <a:spAutoFit/>
-          </a:bodyPr>
-          <a:lstStyle/>
-          <a:p>
-            <a:pPr algn="ctr"/>
-            <a:r>
-              <a:rPr lang="en-US" dirty="0">
-                <a:hlinkClick r:id="rId3"/>
-              </a:rPr>
-              <a:t>https://visualgo.net/en/sorting</a:t>
-            </a:r>
-            <a:r>
-              <a:rPr lang="en-US" dirty="0"/>
-              <a:t> </a:t>
-            </a:r>
-          </a:p>
-        </p:txBody>
-      </p:sp>
-      <p:sp>
-        <p:nvSpPr>
-          <p:cNvPr id="8" name="TextBox 7">
-            <a:extLst>
-              <a:ext uri="{FF2B5EF4-FFF2-40B4-BE49-F238E27FC236}">
-                <a16:creationId xmlns:a16="http://schemas.microsoft.com/office/drawing/2014/main" id="{0912DFED-C05C-71C5-C17A-D8B81D10A376}"/>
-              </a:ext>
-            </a:extLst>
-          </p:cNvPr>
-          <p:cNvSpPr txBox="1"/>
-          <p:nvPr/>
-        </p:nvSpPr>
-        <p:spPr>
-          <a:xfrm>
-            <a:off x="2313516" y="5892100"/>
-            <a:ext cx="8500533" cy="369332"/>
-          </a:xfrm>
-          <a:prstGeom prst="rect">
-            <a:avLst/>
-          </a:prstGeom>
-          <a:noFill/>
-        </p:spPr>
-        <p:txBody>
-          <a:bodyPr wrap="square">
-            <a:spAutoFit/>
-          </a:bodyPr>
-          <a:lstStyle/>
-          <a:p>
-            <a:r>
-              <a:rPr lang="en-US" dirty="0">
-                <a:hlinkClick r:id="rId4"/>
-              </a:rPr>
-              <a:t>https://www.hackerearth.com/practice/algorithms/sorting/merge-sort/visualize/</a:t>
-            </a:r>
-            <a:r>
-              <a:rPr lang="en-US" dirty="0"/>
-              <a:t> </a:t>
-            </a:r>
-          </a:p>
-        </p:txBody>
-      </p:sp>
-      <p:sp>
-        <p:nvSpPr>
-          <p:cNvPr id="10" name="TextBox 9">
-            <a:extLst>
-              <a:ext uri="{FF2B5EF4-FFF2-40B4-BE49-F238E27FC236}">
-                <a16:creationId xmlns:a16="http://schemas.microsoft.com/office/drawing/2014/main" id="{7780DD34-F23D-0E8C-6CB5-8FC25C82B649}"/>
-              </a:ext>
-            </a:extLst>
-          </p:cNvPr>
-          <p:cNvSpPr txBox="1"/>
-          <p:nvPr/>
-        </p:nvSpPr>
-        <p:spPr>
-          <a:xfrm>
-            <a:off x="5198532" y="4983202"/>
-            <a:ext cx="2730500" cy="369332"/>
-          </a:xfrm>
-          <a:prstGeom prst="rect">
-            <a:avLst/>
-          </a:prstGeom>
-          <a:noFill/>
-        </p:spPr>
-        <p:txBody>
-          <a:bodyPr wrap="square" rtlCol="0">
-            <a:spAutoFit/>
-          </a:bodyPr>
-          <a:lstStyle/>
-          <a:p>
-            <a:r>
-              <a:rPr lang="en-US" b="1" dirty="0"/>
-              <a:t>Visualization Tools:</a:t>
-            </a:r>
-          </a:p>
-        </p:txBody>
-      </p:sp>
     </p:spTree>
     <p:extLst>
       <p:ext uri="{BB962C8B-B14F-4D97-AF65-F5344CB8AC3E}">
